--- a/ppt/orion_ko.pptx
+++ b/ppt/orion_ko.pptx
@@ -9955,7 +9955,7 @@
                 </a:solidFill>
                 <a:latin typeface="맑은 고딕"/>
               </a:rPr>
-              <a:t>Nature Computational Science</a:t>
+              <a:t>Research Presentation</a:t>
             </a:r>
             <a:endParaRPr lang="en-US" sz="1800" b="0" strike="noStrike" spc="-1" dirty="0">
               <a:solidFill>
@@ -10453,33 +10453,6 @@
               </a:rPr>
               <a:t>프로젝트  </a:t>
             </a:r>
-            <a:r>
-              <a:rPr lang="en-US" sz="1100" b="0" strike="noStrike" spc="-1" dirty="0">
-                <a:solidFill>
-                  <a:srgbClr val="FFFFFF"/>
-                </a:solidFill>
-                <a:latin typeface="Calibri"/>
-              </a:rPr>
-              <a:t>|  Nature Computational Science (</a:t>
-            </a:r>
-            <a:r>
-              <a:rPr lang="ko-KR" sz="1100" b="0" strike="noStrike" spc="-1" dirty="0">
-                <a:solidFill>
-                  <a:srgbClr val="FFFFFF"/>
-                </a:solidFill>
-                <a:latin typeface="Calibri"/>
-              </a:rPr>
-              <a:t>심사 중</a:t>
-            </a:r>
-            <a:r>
-              <a:rPr lang="en-US" sz="1100" b="0" strike="noStrike" spc="-1" dirty="0">
-                <a:solidFill>
-                  <a:srgbClr val="FFFFFF"/>
-                </a:solidFill>
-                <a:latin typeface="Calibri"/>
-              </a:rPr>
-              <a:t>)</a:t>
-            </a:r>
             <a:endParaRPr lang="en-US" sz="1100" b="0" strike="noStrike" spc="-1" dirty="0">
               <a:solidFill>
                 <a:srgbClr val="000000"/>
@@ -13287,33 +13260,6 @@
               </a:rPr>
               <a:t>프로젝트  </a:t>
             </a:r>
-            <a:r>
-              <a:rPr lang="en-US" sz="1100" b="0" strike="noStrike" spc="-1">
-                <a:solidFill>
-                  <a:srgbClr val="FFFFFF"/>
-                </a:solidFill>
-                <a:latin typeface="Calibri"/>
-              </a:rPr>
-              <a:t>|  Nature Computational Science (</a:t>
-            </a:r>
-            <a:r>
-              <a:rPr lang="ko-KR" sz="1100" b="0" strike="noStrike" spc="-1">
-                <a:solidFill>
-                  <a:srgbClr val="FFFFFF"/>
-                </a:solidFill>
-                <a:latin typeface="Calibri"/>
-              </a:rPr>
-              <a:t>심사 중</a:t>
-            </a:r>
-            <a:r>
-              <a:rPr lang="en-US" sz="1100" b="0" strike="noStrike" spc="-1">
-                <a:solidFill>
-                  <a:srgbClr val="FFFFFF"/>
-                </a:solidFill>
-                <a:latin typeface="Calibri"/>
-              </a:rPr>
-              <a:t>)</a:t>
-            </a:r>
             <a:endParaRPr lang="en-US" sz="1100" b="0" strike="noStrike" spc="-1">
               <a:solidFill>
                 <a:srgbClr val="000000"/>
@@ -14313,33 +14259,6 @@
               </a:rPr>
               <a:t>프로젝트  </a:t>
             </a:r>
-            <a:r>
-              <a:rPr lang="en-US" sz="1100" b="0" strike="noStrike" spc="-1" dirty="0">
-                <a:solidFill>
-                  <a:srgbClr val="FFFFFF"/>
-                </a:solidFill>
-                <a:latin typeface="Calibri"/>
-              </a:rPr>
-              <a:t>|  Nature Computational Science (</a:t>
-            </a:r>
-            <a:r>
-              <a:rPr lang="ko-KR" sz="1100" b="0" strike="noStrike" spc="-1" dirty="0">
-                <a:solidFill>
-                  <a:srgbClr val="FFFFFF"/>
-                </a:solidFill>
-                <a:latin typeface="Calibri"/>
-              </a:rPr>
-              <a:t>심사 중</a:t>
-            </a:r>
-            <a:r>
-              <a:rPr lang="en-US" sz="1100" b="0" strike="noStrike" spc="-1" dirty="0">
-                <a:solidFill>
-                  <a:srgbClr val="FFFFFF"/>
-                </a:solidFill>
-                <a:latin typeface="Calibri"/>
-              </a:rPr>
-              <a:t>)</a:t>
-            </a:r>
             <a:endParaRPr lang="en-US" sz="1100" b="0" strike="noStrike" spc="-1" dirty="0">
               <a:solidFill>
                 <a:srgbClr val="000000"/>
@@ -16528,33 +16447,6 @@
               </a:rPr>
               <a:t>프로젝트  </a:t>
             </a:r>
-            <a:r>
-              <a:rPr lang="en-US" sz="1100" b="0" strike="noStrike" spc="-1" dirty="0">
-                <a:solidFill>
-                  <a:srgbClr val="FFFFFF"/>
-                </a:solidFill>
-                <a:latin typeface="Calibri"/>
-              </a:rPr>
-              <a:t>|  Nature Computational Science (</a:t>
-            </a:r>
-            <a:r>
-              <a:rPr lang="ko-KR" sz="1100" b="0" strike="noStrike" spc="-1" dirty="0">
-                <a:solidFill>
-                  <a:srgbClr val="FFFFFF"/>
-                </a:solidFill>
-                <a:latin typeface="Calibri"/>
-              </a:rPr>
-              <a:t>심사 중</a:t>
-            </a:r>
-            <a:r>
-              <a:rPr lang="en-US" sz="1100" b="0" strike="noStrike" spc="-1" dirty="0">
-                <a:solidFill>
-                  <a:srgbClr val="FFFFFF"/>
-                </a:solidFill>
-                <a:latin typeface="Calibri"/>
-              </a:rPr>
-              <a:t>)</a:t>
-            </a:r>
             <a:endParaRPr lang="en-US" sz="1100" b="0" strike="noStrike" spc="-1" dirty="0">
               <a:solidFill>
                 <a:srgbClr val="000000"/>
@@ -17744,33 +17636,6 @@
               </a:rPr>
               <a:t>프로젝트  </a:t>
             </a:r>
-            <a:r>
-              <a:rPr lang="en-US" sz="1100" b="0" strike="noStrike" spc="-1" dirty="0">
-                <a:solidFill>
-                  <a:srgbClr val="FFFFFF"/>
-                </a:solidFill>
-                <a:latin typeface="Calibri"/>
-              </a:rPr>
-              <a:t>|  Nature Computational Science (</a:t>
-            </a:r>
-            <a:r>
-              <a:rPr lang="ko-KR" sz="1100" b="0" strike="noStrike" spc="-1" dirty="0">
-                <a:solidFill>
-                  <a:srgbClr val="FFFFFF"/>
-                </a:solidFill>
-                <a:latin typeface="Calibri"/>
-              </a:rPr>
-              <a:t>심사 중</a:t>
-            </a:r>
-            <a:r>
-              <a:rPr lang="en-US" sz="1100" b="0" strike="noStrike" spc="-1" dirty="0">
-                <a:solidFill>
-                  <a:srgbClr val="FFFFFF"/>
-                </a:solidFill>
-                <a:latin typeface="Calibri"/>
-              </a:rPr>
-              <a:t>)</a:t>
-            </a:r>
             <a:endParaRPr lang="en-US" sz="1100" b="0" strike="noStrike" spc="-1" dirty="0">
               <a:solidFill>
                 <a:srgbClr val="000000"/>
@@ -20493,33 +20358,6 @@
               </a:rPr>
               <a:t>프로젝트  </a:t>
             </a:r>
-            <a:r>
-              <a:rPr lang="en-US" sz="1100" b="0" strike="noStrike" spc="-1" dirty="0">
-                <a:solidFill>
-                  <a:srgbClr val="FFFFFF"/>
-                </a:solidFill>
-                <a:latin typeface="Calibri"/>
-              </a:rPr>
-              <a:t>|  Nature Computational Science (</a:t>
-            </a:r>
-            <a:r>
-              <a:rPr lang="ko-KR" sz="1100" b="0" strike="noStrike" spc="-1" dirty="0">
-                <a:solidFill>
-                  <a:srgbClr val="FFFFFF"/>
-                </a:solidFill>
-                <a:latin typeface="Calibri"/>
-              </a:rPr>
-              <a:t>심사 중</a:t>
-            </a:r>
-            <a:r>
-              <a:rPr lang="en-US" sz="1100" b="0" strike="noStrike" spc="-1" dirty="0">
-                <a:solidFill>
-                  <a:srgbClr val="FFFFFF"/>
-                </a:solidFill>
-                <a:latin typeface="Calibri"/>
-              </a:rPr>
-              <a:t>)</a:t>
-            </a:r>
             <a:endParaRPr lang="en-US" sz="1100" b="0" strike="noStrike" spc="-1" dirty="0">
               <a:solidFill>
                 <a:srgbClr val="000000"/>
@@ -23280,33 +23118,6 @@
               </a:rPr>
               <a:t>프로젝트  </a:t>
             </a:r>
-            <a:r>
-              <a:rPr lang="en-US" sz="1100" b="0" strike="noStrike" spc="-1" dirty="0">
-                <a:solidFill>
-                  <a:srgbClr val="FFFFFF"/>
-                </a:solidFill>
-                <a:latin typeface="Calibri"/>
-              </a:rPr>
-              <a:t>|  Nature Computational Science (</a:t>
-            </a:r>
-            <a:r>
-              <a:rPr lang="ko-KR" sz="1100" b="0" strike="noStrike" spc="-1" dirty="0">
-                <a:solidFill>
-                  <a:srgbClr val="FFFFFF"/>
-                </a:solidFill>
-                <a:latin typeface="Calibri"/>
-              </a:rPr>
-              <a:t>심사 중</a:t>
-            </a:r>
-            <a:r>
-              <a:rPr lang="en-US" sz="1100" b="0" strike="noStrike" spc="-1" dirty="0">
-                <a:solidFill>
-                  <a:srgbClr val="FFFFFF"/>
-                </a:solidFill>
-                <a:latin typeface="Calibri"/>
-              </a:rPr>
-              <a:t>)</a:t>
-            </a:r>
             <a:endParaRPr lang="en-US" sz="1100" b="0" strike="noStrike" spc="-1" dirty="0">
               <a:solidFill>
                 <a:srgbClr val="000000"/>
@@ -25460,33 +25271,6 @@
               </a:rPr>
               <a:t>프로젝트  </a:t>
             </a:r>
-            <a:r>
-              <a:rPr lang="en-US" sz="1100" b="0" strike="noStrike" spc="-1" dirty="0">
-                <a:solidFill>
-                  <a:srgbClr val="FFFFFF"/>
-                </a:solidFill>
-                <a:latin typeface="Calibri"/>
-              </a:rPr>
-              <a:t>|  Nature Computational Science (</a:t>
-            </a:r>
-            <a:r>
-              <a:rPr lang="ko-KR" sz="1100" b="0" strike="noStrike" spc="-1" dirty="0">
-                <a:solidFill>
-                  <a:srgbClr val="FFFFFF"/>
-                </a:solidFill>
-                <a:latin typeface="Calibri"/>
-              </a:rPr>
-              <a:t>심사 중</a:t>
-            </a:r>
-            <a:r>
-              <a:rPr lang="en-US" sz="1100" b="0" strike="noStrike" spc="-1" dirty="0">
-                <a:solidFill>
-                  <a:srgbClr val="FFFFFF"/>
-                </a:solidFill>
-                <a:latin typeface="Calibri"/>
-              </a:rPr>
-              <a:t>)</a:t>
-            </a:r>
             <a:endParaRPr lang="en-US" sz="1100" b="0" strike="noStrike" spc="-1" dirty="0">
               <a:solidFill>
                 <a:srgbClr val="000000"/>
@@ -27621,33 +27405,6 @@
                 <a:latin typeface="Calibri"/>
               </a:rPr>
               <a:t>프로젝트  </a:t>
-            </a:r>
-            <a:r>
-              <a:rPr lang="en-US" sz="1100" b="0" strike="noStrike" spc="-1" dirty="0">
-                <a:solidFill>
-                  <a:srgbClr val="FFFFFF"/>
-                </a:solidFill>
-                <a:latin typeface="Calibri"/>
-              </a:rPr>
-              <a:t>|  Nature Computational Science (</a:t>
-            </a:r>
-            <a:r>
-              <a:rPr lang="ko-KR" sz="1100" b="0" strike="noStrike" spc="-1" dirty="0">
-                <a:solidFill>
-                  <a:srgbClr val="FFFFFF"/>
-                </a:solidFill>
-                <a:latin typeface="Calibri"/>
-              </a:rPr>
-              <a:t>심사 중</a:t>
-            </a:r>
-            <a:r>
-              <a:rPr lang="en-US" sz="1100" b="0" strike="noStrike" spc="-1" dirty="0">
-                <a:solidFill>
-                  <a:srgbClr val="FFFFFF"/>
-                </a:solidFill>
-                <a:latin typeface="Calibri"/>
-              </a:rPr>
-              <a:t>)</a:t>
             </a:r>
             <a:endParaRPr lang="en-US" sz="1100" b="0" strike="noStrike" spc="-1" dirty="0">
               <a:solidFill>
